--- a/DELIVERABLES/Convergence_SaaS/00_보고/경영보고_종합안_v1.pptx
+++ b/DELIVERABLES/Convergence_SaaS/00_보고/경영보고_종합안_v1.pptx
@@ -6,17 +6,17 @@
   </p:sldMasterIdLst>
   <p:sldIdLst>
     <p:sldId id="256" r:id="rId7"/>
-    <p:sldId id="257" r:id="rId8"/>
-    <p:sldId id="258" r:id="rId9"/>
-    <p:sldId id="259" r:id="rId10"/>
-    <p:sldId id="260" r:id="rId11"/>
-    <p:sldId id="261" r:id="rId12"/>
-    <p:sldId id="262" r:id="rId13"/>
-    <p:sldId id="263" r:id="rId14"/>
-    <p:sldId id="264" r:id="rId15"/>
-    <p:sldId id="265" r:id="rId16"/>
-    <p:sldId id="266" r:id="rId17"/>
-    <p:sldId id="267" r:id="rId18"/>
+    <p:sldId id="257" r:id="rId9"/>
+    <p:sldId id="258" r:id="rId10"/>
+    <p:sldId id="259" r:id="rId11"/>
+    <p:sldId id="260" r:id="rId12"/>
+    <p:sldId id="261" r:id="rId13"/>
+    <p:sldId id="262" r:id="rId14"/>
+    <p:sldId id="263" r:id="rId15"/>
+    <p:sldId id="264" r:id="rId16"/>
+    <p:sldId id="265" r:id="rId17"/>
+    <p:sldId id="266" r:id="rId18"/>
+    <p:sldId id="267" r:id="rId19"/>
   </p:sldIdLst>
   <p:sldSz cx="12191695" cy="6858000" type="screen4x3"/>
   <p:notesSz cx="6858000" cy="9144000"/>
@@ -116,6 +116,1316 @@
     </a:lvl9pPr>
   </p:defaultTextStyle>
 </p:presentation>
+</file>
+
+<file path=ppt/notesMasters/notesMaster1.xml><?xml version="1.0" encoding="utf-8"?>
+<p:notesMaster xmlns:a="http://schemas.openxmlformats.org/drawingml/2006/main" xmlns:p="http://schemas.openxmlformats.org/presentationml/2006/main" xmlns:r="http://schemas.openxmlformats.org/officeDocument/2006/relationships">
+  <p:cSld>
+    <p:bg>
+      <p:bgRef idx="1001">
+        <a:schemeClr val="bg1"/>
+      </p:bgRef>
+    </p:bg>
+    <p:spTree>
+      <p:nvGrpSpPr>
+        <p:cNvPr id="1" name=""/>
+        <p:cNvGrpSpPr/>
+        <p:nvPr/>
+      </p:nvGrpSpPr>
+      <p:grpSpPr>
+        <a:xfrm>
+          <a:off x="0" y="0"/>
+          <a:ext cx="0" cy="0"/>
+          <a:chOff x="0" y="0"/>
+          <a:chExt cx="0" cy="0"/>
+        </a:xfrm>
+      </p:grpSpPr>
+      <p:sp>
+        <p:nvSpPr>
+          <p:cNvPr id="2" name="Header Placeholder 1"/>
+          <p:cNvSpPr>
+            <a:spLocks noGrp="1"/>
+          </p:cNvSpPr>
+          <p:nvPr>
+            <p:ph type="hdr" sz="quarter"/>
+          </p:nvPr>
+        </p:nvSpPr>
+        <p:spPr>
+          <a:xfrm>
+            <a:off x="0" y="0"/>
+            <a:ext cx="2971800" cy="457200"/>
+          </a:xfrm>
+          <a:prstGeom prst="rect">
+            <a:avLst/>
+          </a:prstGeom>
+        </p:spPr>
+        <p:txBody>
+          <a:bodyPr vert="horz" lIns="91440" tIns="45720" rIns="91440" bIns="45720" rtlCol="0"/>
+          <a:lstStyle>
+            <a:lvl1pPr algn="l">
+              <a:defRPr sz="1200"/>
+            </a:lvl1pPr>
+          </a:lstStyle>
+          <a:p>
+            <a:endParaRPr lang="en-US"/>
+          </a:p>
+        </p:txBody>
+      </p:sp>
+      <p:sp>
+        <p:nvSpPr>
+          <p:cNvPr id="3" name="Date Placeholder 2"/>
+          <p:cNvSpPr>
+            <a:spLocks noGrp="1"/>
+          </p:cNvSpPr>
+          <p:nvPr>
+            <p:ph type="dt" idx="1"/>
+          </p:nvPr>
+        </p:nvSpPr>
+        <p:spPr>
+          <a:xfrm>
+            <a:off x="3884613" y="0"/>
+            <a:ext cx="2971800" cy="457200"/>
+          </a:xfrm>
+          <a:prstGeom prst="rect">
+            <a:avLst/>
+          </a:prstGeom>
+        </p:spPr>
+        <p:txBody>
+          <a:bodyPr vert="horz" lIns="91440" tIns="45720" rIns="91440" bIns="45720" rtlCol="0"/>
+          <a:lstStyle>
+            <a:lvl1pPr algn="r">
+              <a:defRPr sz="1200"/>
+            </a:lvl1pPr>
+          </a:lstStyle>
+          <a:p>
+            <a:fld id="{0F89C1C7-3DCD-1040-A9CF-14679D8B5DDD}" type="datetimeFigureOut">
+              <a:rPr lang="en-US" smtClean="0"/>
+              <a:t>10/17/16</a:t>
+            </a:fld>
+            <a:endParaRPr lang="en-US"/>
+          </a:p>
+        </p:txBody>
+      </p:sp>
+      <p:sp>
+        <p:nvSpPr>
+          <p:cNvPr id="4" name="Slide Image Placeholder 3"/>
+          <p:cNvSpPr>
+            <a:spLocks noGrp="1" noRot="1" noChangeAspect="1"/>
+          </p:cNvSpPr>
+          <p:nvPr>
+            <p:ph type="sldImg" idx="2"/>
+          </p:nvPr>
+        </p:nvSpPr>
+        <p:spPr>
+          <a:xfrm>
+            <a:off x="1143000" y="685800"/>
+            <a:ext cx="4572000" cy="3429000"/>
+          </a:xfrm>
+          <a:prstGeom prst="rect">
+            <a:avLst/>
+          </a:prstGeom>
+          <a:noFill/>
+          <a:ln w="12700">
+            <a:solidFill>
+              <a:prstClr val="black"/>
+            </a:solidFill>
+          </a:ln>
+        </p:spPr>
+        <p:txBody>
+          <a:bodyPr vert="horz" lIns="91440" tIns="45720" rIns="91440" bIns="45720" rtlCol="0" anchor="ctr"/>
+          <a:lstStyle/>
+          <a:p>
+            <a:endParaRPr lang="en-US"/>
+          </a:p>
+        </p:txBody>
+      </p:sp>
+      <p:sp>
+        <p:nvSpPr>
+          <p:cNvPr id="5" name="Notes Placeholder 4"/>
+          <p:cNvSpPr>
+            <a:spLocks noGrp="1"/>
+          </p:cNvSpPr>
+          <p:nvPr>
+            <p:ph type="body" sz="quarter" idx="3"/>
+          </p:nvPr>
+        </p:nvSpPr>
+        <p:spPr>
+          <a:xfrm>
+            <a:off x="685800" y="4343400"/>
+            <a:ext cx="5486400" cy="4114800"/>
+          </a:xfrm>
+          <a:prstGeom prst="rect">
+            <a:avLst/>
+          </a:prstGeom>
+        </p:spPr>
+        <p:txBody>
+          <a:bodyPr vert="horz" lIns="91440" tIns="45720" rIns="91440" bIns="45720" rtlCol="0"/>
+          <a:lstStyle/>
+          <a:p>
+            <a:pPr lvl="0"/>
+            <a:r>
+              <a:rPr lang="en-US" smtClean="0"/>
+              <a:t>Click to edit Master text styles</a:t>
+            </a:r>
+          </a:p>
+          <a:p>
+            <a:pPr lvl="1"/>
+            <a:r>
+              <a:rPr lang="en-US" smtClean="0"/>
+              <a:t>Second level</a:t>
+            </a:r>
+          </a:p>
+          <a:p>
+            <a:pPr lvl="2"/>
+            <a:r>
+              <a:rPr lang="en-US" smtClean="0"/>
+              <a:t>Third level</a:t>
+            </a:r>
+          </a:p>
+          <a:p>
+            <a:pPr lvl="3"/>
+            <a:r>
+              <a:rPr lang="en-US" smtClean="0"/>
+              <a:t>Fourth level</a:t>
+            </a:r>
+          </a:p>
+          <a:p>
+            <a:pPr lvl="4"/>
+            <a:r>
+              <a:rPr lang="en-US" smtClean="0"/>
+              <a:t>Fifth level</a:t>
+            </a:r>
+            <a:endParaRPr lang="en-US"/>
+          </a:p>
+        </p:txBody>
+      </p:sp>
+      <p:sp>
+        <p:nvSpPr>
+          <p:cNvPr id="6" name="Footer Placeholder 5"/>
+          <p:cNvSpPr>
+            <a:spLocks noGrp="1"/>
+          </p:cNvSpPr>
+          <p:nvPr>
+            <p:ph type="ftr" sz="quarter" idx="4"/>
+          </p:nvPr>
+        </p:nvSpPr>
+        <p:spPr>
+          <a:xfrm>
+            <a:off x="0" y="8685213"/>
+            <a:ext cx="2971800" cy="457200"/>
+          </a:xfrm>
+          <a:prstGeom prst="rect">
+            <a:avLst/>
+          </a:prstGeom>
+        </p:spPr>
+        <p:txBody>
+          <a:bodyPr vert="horz" lIns="91440" tIns="45720" rIns="91440" bIns="45720" rtlCol="0" anchor="b"/>
+          <a:lstStyle>
+            <a:lvl1pPr algn="l">
+              <a:defRPr sz="1200"/>
+            </a:lvl1pPr>
+          </a:lstStyle>
+          <a:p>
+            <a:endParaRPr lang="en-US"/>
+          </a:p>
+        </p:txBody>
+      </p:sp>
+      <p:sp>
+        <p:nvSpPr>
+          <p:cNvPr id="7" name="Slide Number Placeholder 6"/>
+          <p:cNvSpPr>
+            <a:spLocks noGrp="1"/>
+          </p:cNvSpPr>
+          <p:nvPr>
+            <p:ph type="sldNum" sz="quarter" idx="5"/>
+          </p:nvPr>
+        </p:nvSpPr>
+        <p:spPr>
+          <a:xfrm>
+            <a:off x="3884613" y="8685213"/>
+            <a:ext cx="2971800" cy="457200"/>
+          </a:xfrm>
+          <a:prstGeom prst="rect">
+            <a:avLst/>
+          </a:prstGeom>
+        </p:spPr>
+        <p:txBody>
+          <a:bodyPr vert="horz" lIns="91440" tIns="45720" rIns="91440" bIns="45720" rtlCol="0" anchor="b"/>
+          <a:lstStyle>
+            <a:lvl1pPr algn="r">
+              <a:defRPr sz="1200"/>
+            </a:lvl1pPr>
+          </a:lstStyle>
+          <a:p>
+            <a:fld id="{BB5E49A5-4136-284D-997B-48E1D791AD67}" type="slidenum">
+              <a:rPr lang="en-US" smtClean="0"/>
+              <a:t>‹#›</a:t>
+            </a:fld>
+            <a:endParaRPr lang="en-US"/>
+          </a:p>
+        </p:txBody>
+      </p:sp>
+    </p:spTree>
+    <p:extLst>
+      <p:ext uri="{BB962C8B-B14F-4D97-AF65-F5344CB8AC3E}">
+        <p14:creationId xmlns:p14="http://schemas.microsoft.com/office/powerpoint/2010/main" val="2623252185"/>
+      </p:ext>
+    </p:extLst>
+  </p:cSld>
+  <p:clrMap bg1="lt1" tx1="dk1" bg2="lt2" tx2="dk2" accent1="accent1" accent2="accent2" accent3="accent3" accent4="accent4" accent5="accent5" accent6="accent6" hlink="hlink" folHlink="folHlink"/>
+  <p:notesStyle>
+    <a:lvl1pPr marL="0" algn="l" defTabSz="457200" rtl="0" eaLnBrk="1" latinLnBrk="0" hangingPunct="1">
+      <a:defRPr sz="1200" kern="1200">
+        <a:solidFill>
+          <a:schemeClr val="tx1"/>
+        </a:solidFill>
+        <a:latin typeface="+mn-lt"/>
+        <a:ea typeface="+mn-ea"/>
+        <a:cs typeface="+mn-cs"/>
+      </a:defRPr>
+    </a:lvl1pPr>
+    <a:lvl2pPr marL="457200" algn="l" defTabSz="457200" rtl="0" eaLnBrk="1" latinLnBrk="0" hangingPunct="1">
+      <a:defRPr sz="1200" kern="1200">
+        <a:solidFill>
+          <a:schemeClr val="tx1"/>
+        </a:solidFill>
+        <a:latin typeface="+mn-lt"/>
+        <a:ea typeface="+mn-ea"/>
+        <a:cs typeface="+mn-cs"/>
+      </a:defRPr>
+    </a:lvl2pPr>
+    <a:lvl3pPr marL="914400" algn="l" defTabSz="457200" rtl="0" eaLnBrk="1" latinLnBrk="0" hangingPunct="1">
+      <a:defRPr sz="1200" kern="1200">
+        <a:solidFill>
+          <a:schemeClr val="tx1"/>
+        </a:solidFill>
+        <a:latin typeface="+mn-lt"/>
+        <a:ea typeface="+mn-ea"/>
+        <a:cs typeface="+mn-cs"/>
+      </a:defRPr>
+    </a:lvl3pPr>
+    <a:lvl4pPr marL="1371600" algn="l" defTabSz="457200" rtl="0" eaLnBrk="1" latinLnBrk="0" hangingPunct="1">
+      <a:defRPr sz="1200" kern="1200">
+        <a:solidFill>
+          <a:schemeClr val="tx1"/>
+        </a:solidFill>
+        <a:latin typeface="+mn-lt"/>
+        <a:ea typeface="+mn-ea"/>
+        <a:cs typeface="+mn-cs"/>
+      </a:defRPr>
+    </a:lvl4pPr>
+    <a:lvl5pPr marL="1828800" algn="l" defTabSz="457200" rtl="0" eaLnBrk="1" latinLnBrk="0" hangingPunct="1">
+      <a:defRPr sz="1200" kern="1200">
+        <a:solidFill>
+          <a:schemeClr val="tx1"/>
+        </a:solidFill>
+        <a:latin typeface="+mn-lt"/>
+        <a:ea typeface="+mn-ea"/>
+        <a:cs typeface="+mn-cs"/>
+      </a:defRPr>
+    </a:lvl5pPr>
+    <a:lvl6pPr marL="2286000" algn="l" defTabSz="457200" rtl="0" eaLnBrk="1" latinLnBrk="0" hangingPunct="1">
+      <a:defRPr sz="1200" kern="1200">
+        <a:solidFill>
+          <a:schemeClr val="tx1"/>
+        </a:solidFill>
+        <a:latin typeface="+mn-lt"/>
+        <a:ea typeface="+mn-ea"/>
+        <a:cs typeface="+mn-cs"/>
+      </a:defRPr>
+    </a:lvl6pPr>
+    <a:lvl7pPr marL="2743200" algn="l" defTabSz="457200" rtl="0" eaLnBrk="1" latinLnBrk="0" hangingPunct="1">
+      <a:defRPr sz="1200" kern="1200">
+        <a:solidFill>
+          <a:schemeClr val="tx1"/>
+        </a:solidFill>
+        <a:latin typeface="+mn-lt"/>
+        <a:ea typeface="+mn-ea"/>
+        <a:cs typeface="+mn-cs"/>
+      </a:defRPr>
+    </a:lvl7pPr>
+    <a:lvl8pPr marL="3200400" algn="l" defTabSz="457200" rtl="0" eaLnBrk="1" latinLnBrk="0" hangingPunct="1">
+      <a:defRPr sz="1200" kern="1200">
+        <a:solidFill>
+          <a:schemeClr val="tx1"/>
+        </a:solidFill>
+        <a:latin typeface="+mn-lt"/>
+        <a:ea typeface="+mn-ea"/>
+        <a:cs typeface="+mn-cs"/>
+      </a:defRPr>
+    </a:lvl8pPr>
+    <a:lvl9pPr marL="3657600" algn="l" defTabSz="457200" rtl="0" eaLnBrk="1" latinLnBrk="0" hangingPunct="1">
+      <a:defRPr sz="1200" kern="1200">
+        <a:solidFill>
+          <a:schemeClr val="tx1"/>
+        </a:solidFill>
+        <a:latin typeface="+mn-lt"/>
+        <a:ea typeface="+mn-ea"/>
+        <a:cs typeface="+mn-cs"/>
+      </a:defRPr>
+    </a:lvl9pPr>
+  </p:notesStyle>
+</p:notesMaster>
+</file>
+
+<file path=ppt/notesSlides/notesSlide1.xml><?xml version="1.0" encoding="utf-8"?>
+<p:notes xmlns:a="http://schemas.openxmlformats.org/drawingml/2006/main" xmlns:p="http://schemas.openxmlformats.org/presentationml/2006/main" xmlns:r="http://schemas.openxmlformats.org/officeDocument/2006/relationships">
+  <p:cSld>
+    <p:spTree>
+      <p:nvGrpSpPr>
+        <p:cNvPr id="1" name=""/>
+        <p:cNvGrpSpPr/>
+        <p:nvPr/>
+      </p:nvGrpSpPr>
+      <p:grpSpPr>
+        <a:xfrm>
+          <a:off x="0" y="0"/>
+          <a:ext cx="0" cy="0"/>
+          <a:chOff x="0" y="0"/>
+          <a:chExt cx="0" cy="0"/>
+        </a:xfrm>
+      </p:grpSpPr>
+      <p:sp>
+        <p:nvSpPr>
+          <p:cNvPr id="2" name="Slide Image Placeholder 1"/>
+          <p:cNvSpPr>
+            <a:spLocks noGrp="1"/>
+          </p:cNvSpPr>
+          <p:nvPr>
+            <p:ph type="sldImg" idx="2"/>
+          </p:nvPr>
+        </p:nvSpPr>
+        <p:spPr/>
+      </p:sp>
+      <p:sp>
+        <p:nvSpPr>
+          <p:cNvPr id="3" name="Notes Placeholder 2"/>
+          <p:cNvSpPr>
+            <a:spLocks noGrp="1"/>
+          </p:cNvSpPr>
+          <p:nvPr>
+            <p:ph type="body" idx="3" sz="quarter"/>
+          </p:nvPr>
+        </p:nvSpPr>
+        <p:spPr/>
+        <p:txBody>
+          <a:bodyPr/>
+          <a:lstStyle/>
+          <a:p>
+            <a:r>
+              <a:t>오늘 보고 목적: 컨버전스 실적관리 앱을 여러 회사가 쓰는 SaaS 제품으로 키우는 안을 승인받는 것. 이미 우리 조직 56명에서 돌아가는 걸 봤고, 그 엔진을 그대로 상품화합니다.</a:t>
+            </a:r>
+          </a:p>
+          <a:p>
+            <a:r>
+              <a:t>▶ 진행: 제품명은 가칭 Converge. 12장, 뒤 3장이 결정 요청.</a:t>
+            </a:r>
+          </a:p>
+          <a:p>
+            <a:r>
+              <a:t>⏱ 소요: 0.5분</a:t>
+            </a:r>
+          </a:p>
+        </p:txBody>
+      </p:sp>
+      <p:sp>
+        <p:nvSpPr>
+          <p:cNvPr id="4" name="Slide Number Placeholder 3"/>
+          <p:cNvSpPr>
+            <a:spLocks noGrp="1"/>
+          </p:cNvSpPr>
+          <p:nvPr>
+            <p:ph type="sldNum" idx="5" sz="quarter"/>
+          </p:nvPr>
+        </p:nvSpPr>
+        <p:spPr/>
+      </p:sp>
+    </p:spTree>
+  </p:cSld>
+  <p:clrMapOvr>
+    <a:masterClrMapping/>
+  </p:clrMapOvr>
+</p:notes>
+</file>
+
+<file path=ppt/notesSlides/notesSlide10.xml><?xml version="1.0" encoding="utf-8"?>
+<p:notes xmlns:a="http://schemas.openxmlformats.org/drawingml/2006/main" xmlns:p="http://schemas.openxmlformats.org/presentationml/2006/main" xmlns:r="http://schemas.openxmlformats.org/officeDocument/2006/relationships">
+  <p:cSld>
+    <p:spTree>
+      <p:nvGrpSpPr>
+        <p:cNvPr id="1" name=""/>
+        <p:cNvGrpSpPr/>
+        <p:nvPr/>
+      </p:nvGrpSpPr>
+      <p:grpSpPr>
+        <a:xfrm>
+          <a:off x="0" y="0"/>
+          <a:ext cx="0" cy="0"/>
+          <a:chOff x="0" y="0"/>
+          <a:chExt cx="0" cy="0"/>
+        </a:xfrm>
+      </p:grpSpPr>
+      <p:sp>
+        <p:nvSpPr>
+          <p:cNvPr id="2" name="Slide Image Placeholder 1"/>
+          <p:cNvSpPr>
+            <a:spLocks noGrp="1"/>
+          </p:cNvSpPr>
+          <p:nvPr>
+            <p:ph type="sldImg" idx="2"/>
+          </p:nvPr>
+        </p:nvSpPr>
+        <p:spPr/>
+      </p:sp>
+      <p:sp>
+        <p:nvSpPr>
+          <p:cNvPr id="3" name="Notes Placeholder 2"/>
+          <p:cNvSpPr>
+            <a:spLocks noGrp="1"/>
+          </p:cNvSpPr>
+          <p:nvPr>
+            <p:ph type="body" idx="3" sz="quarter"/>
+          </p:nvPr>
+        </p:nvSpPr>
+        <p:spPr/>
+        <p:txBody>
+          <a:bodyPr/>
+          <a:lstStyle/>
+          <a:p>
+            <a:r>
+              <a:t>일정은 3구간. 올해 하반기 MVP(파일럿), 내년 상반기 유료화(30개), 하반기 스케일. 의존성 순서가 고정 — M0부터 순서대로 가야 하고, 각 구간엔 격리 자동 테스트라는 통과 게이트가 있습니다.</a:t>
+            </a:r>
+          </a:p>
+          <a:p>
+            <a:r>
+              <a:t>▶ 진행: '언제 매출이 나오나' 질문엔 v1(2027 상반기 유료 30개)로 답.</a:t>
+            </a:r>
+          </a:p>
+          <a:p>
+            <a:r>
+              <a:t>⏱ 소요: 1분</a:t>
+            </a:r>
+          </a:p>
+        </p:txBody>
+      </p:sp>
+      <p:sp>
+        <p:nvSpPr>
+          <p:cNvPr id="4" name="Slide Number Placeholder 3"/>
+          <p:cNvSpPr>
+            <a:spLocks noGrp="1"/>
+          </p:cNvSpPr>
+          <p:nvPr>
+            <p:ph type="sldNum" idx="5" sz="quarter"/>
+          </p:nvPr>
+        </p:nvSpPr>
+        <p:spPr/>
+      </p:sp>
+    </p:spTree>
+  </p:cSld>
+  <p:clrMapOvr>
+    <a:masterClrMapping/>
+  </p:clrMapOvr>
+</p:notes>
+</file>
+
+<file path=ppt/notesSlides/notesSlide11.xml><?xml version="1.0" encoding="utf-8"?>
+<p:notes xmlns:a="http://schemas.openxmlformats.org/drawingml/2006/main" xmlns:p="http://schemas.openxmlformats.org/presentationml/2006/main" xmlns:r="http://schemas.openxmlformats.org/officeDocument/2006/relationships">
+  <p:cSld>
+    <p:spTree>
+      <p:nvGrpSpPr>
+        <p:cNvPr id="1" name=""/>
+        <p:cNvGrpSpPr/>
+        <p:nvPr/>
+      </p:nvGrpSpPr>
+      <p:grpSpPr>
+        <a:xfrm>
+          <a:off x="0" y="0"/>
+          <a:ext cx="0" cy="0"/>
+          <a:chOff x="0" y="0"/>
+          <a:chExt cx="0" cy="0"/>
+        </a:xfrm>
+      </p:grpSpPr>
+      <p:sp>
+        <p:nvSpPr>
+          <p:cNvPr id="2" name="Slide Image Placeholder 1"/>
+          <p:cNvSpPr>
+            <a:spLocks noGrp="1"/>
+          </p:cNvSpPr>
+          <p:nvPr>
+            <p:ph type="sldImg" idx="2"/>
+          </p:nvPr>
+        </p:nvSpPr>
+        <p:spPr/>
+      </p:sp>
+      <p:sp>
+        <p:nvSpPr>
+          <p:cNvPr id="3" name="Notes Placeholder 2"/>
+          <p:cNvSpPr>
+            <a:spLocks noGrp="1"/>
+          </p:cNvSpPr>
+          <p:nvPr>
+            <p:ph type="body" idx="3" sz="quarter"/>
+          </p:nvPr>
+        </p:nvSpPr>
+        <p:spPr/>
+        <p:txBody>
+          <a:bodyPr/>
+          <a:lstStyle/>
+          <a:p>
+            <a:r>
+              <a:t>이번 회의의 핵심 요청 장. 리스크 중 A3(정합성=M0)와 A4(격리)가 치명군. 그리고 아래 6건은 팀이 권고안을 냈지만 경영이 확정해야 다음 단계 확정이 가능합니다.</a:t>
+            </a:r>
+          </a:p>
+          <a:p>
+            <a:r>
+              <a:t>▶ 진행: 6건 중 최소 ①요금 ②이관 범위 두 건은 오늘 방향이라도 받아낸다.</a:t>
+            </a:r>
+          </a:p>
+          <a:p>
+            <a:r>
+              <a:t>⏱ 소요: 2분</a:t>
+            </a:r>
+          </a:p>
+        </p:txBody>
+      </p:sp>
+      <p:sp>
+        <p:nvSpPr>
+          <p:cNvPr id="4" name="Slide Number Placeholder 3"/>
+          <p:cNvSpPr>
+            <a:spLocks noGrp="1"/>
+          </p:cNvSpPr>
+          <p:nvPr>
+            <p:ph type="sldNum" idx="5" sz="quarter"/>
+          </p:nvPr>
+        </p:nvSpPr>
+        <p:spPr/>
+      </p:sp>
+    </p:spTree>
+  </p:cSld>
+  <p:clrMapOvr>
+    <a:masterClrMapping/>
+  </p:clrMapOvr>
+</p:notes>
+</file>
+
+<file path=ppt/notesSlides/notesSlide12.xml><?xml version="1.0" encoding="utf-8"?>
+<p:notes xmlns:a="http://schemas.openxmlformats.org/drawingml/2006/main" xmlns:p="http://schemas.openxmlformats.org/presentationml/2006/main" xmlns:r="http://schemas.openxmlformats.org/officeDocument/2006/relationships">
+  <p:cSld>
+    <p:spTree>
+      <p:nvGrpSpPr>
+        <p:cNvPr id="1" name=""/>
+        <p:cNvGrpSpPr/>
+        <p:nvPr/>
+      </p:nvGrpSpPr>
+      <p:grpSpPr>
+        <a:xfrm>
+          <a:off x="0" y="0"/>
+          <a:ext cx="0" cy="0"/>
+          <a:chOff x="0" y="0"/>
+          <a:chExt cx="0" cy="0"/>
+        </a:xfrm>
+      </p:grpSpPr>
+      <p:sp>
+        <p:nvSpPr>
+          <p:cNvPr id="2" name="Slide Image Placeholder 1"/>
+          <p:cNvSpPr>
+            <a:spLocks noGrp="1"/>
+          </p:cNvSpPr>
+          <p:nvPr>
+            <p:ph type="sldImg" idx="2"/>
+          </p:nvPr>
+        </p:nvSpPr>
+        <p:spPr/>
+      </p:sp>
+      <p:sp>
+        <p:nvSpPr>
+          <p:cNvPr id="3" name="Notes Placeholder 2"/>
+          <p:cNvSpPr>
+            <a:spLocks noGrp="1"/>
+          </p:cNvSpPr>
+          <p:nvPr>
+            <p:ph type="body" idx="3" sz="quarter"/>
+          </p:nvPr>
+        </p:nvSpPr>
+        <p:spPr/>
+        <p:txBody>
+          <a:bodyPr/>
+          <a:lstStyle/>
+          <a:p>
+            <a:r>
+              <a:t>마무리 &amp; 요청: 오늘 승인만 나면 팀은 1번(M0 버그 수정)부터 바로 착수합니다. 이건 새 개발이 아니라 이미 도는 엔진을 고쳐 얹는 일이라 위험이 낮다는 점을 다시 강조.</a:t>
+            </a:r>
+          </a:p>
+          <a:p>
+            <a:r>
+              <a:t>▶ 진행: 승인·결정 6건·파일럿 예산 3가지를 클로징으로 요청.</a:t>
+            </a:r>
+          </a:p>
+          <a:p>
+            <a:r>
+              <a:t>⏱ 소요: 1분</a:t>
+            </a:r>
+          </a:p>
+        </p:txBody>
+      </p:sp>
+      <p:sp>
+        <p:nvSpPr>
+          <p:cNvPr id="4" name="Slide Number Placeholder 3"/>
+          <p:cNvSpPr>
+            <a:spLocks noGrp="1"/>
+          </p:cNvSpPr>
+          <p:nvPr>
+            <p:ph type="sldNum" idx="5" sz="quarter"/>
+          </p:nvPr>
+        </p:nvSpPr>
+        <p:spPr/>
+      </p:sp>
+    </p:spTree>
+  </p:cSld>
+  <p:clrMapOvr>
+    <a:masterClrMapping/>
+  </p:clrMapOvr>
+</p:notes>
+</file>
+
+<file path=ppt/notesSlides/notesSlide2.xml><?xml version="1.0" encoding="utf-8"?>
+<p:notes xmlns:a="http://schemas.openxmlformats.org/drawingml/2006/main" xmlns:p="http://schemas.openxmlformats.org/presentationml/2006/main" xmlns:r="http://schemas.openxmlformats.org/officeDocument/2006/relationships">
+  <p:cSld>
+    <p:spTree>
+      <p:nvGrpSpPr>
+        <p:cNvPr id="1" name=""/>
+        <p:cNvGrpSpPr/>
+        <p:nvPr/>
+      </p:nvGrpSpPr>
+      <p:grpSpPr>
+        <a:xfrm>
+          <a:off x="0" y="0"/>
+          <a:ext cx="0" cy="0"/>
+          <a:chOff x="0" y="0"/>
+          <a:chExt cx="0" cy="0"/>
+        </a:xfrm>
+      </p:grpSpPr>
+      <p:sp>
+        <p:nvSpPr>
+          <p:cNvPr id="2" name="Slide Image Placeholder 1"/>
+          <p:cNvSpPr>
+            <a:spLocks noGrp="1"/>
+          </p:cNvSpPr>
+          <p:nvPr>
+            <p:ph type="sldImg" idx="2"/>
+          </p:nvPr>
+        </p:nvSpPr>
+        <p:spPr/>
+      </p:sp>
+      <p:sp>
+        <p:nvSpPr>
+          <p:cNvPr id="3" name="Notes Placeholder 2"/>
+          <p:cNvSpPr>
+            <a:spLocks noGrp="1"/>
+          </p:cNvSpPr>
+          <p:nvPr>
+            <p:ph type="body" idx="3" sz="quarter"/>
+          </p:nvPr>
+        </p:nvSpPr>
+        <p:spPr/>
+        <p:txBody>
+          <a:bodyPr/>
+          <a:lstStyle/>
+          <a:p>
+            <a:r>
+              <a:t>한 문장으로: 엑셀로 흩어진 가동률을 5분 만에 '금액'으로 보여주는 도구입니다. 새로 만드는 게 아니라 검증된 엔진을 멀티테넌트로 여는 것이라 리스크가 낮습니다.</a:t>
+            </a:r>
+          </a:p>
+          <a:p>
+            <a:r>
+              <a:t>▶ 진행: '2개 분기 내 파일럿 5~10개'가 이번 승인의 성공 지표.</a:t>
+            </a:r>
+          </a:p>
+          <a:p>
+            <a:r>
+              <a:t>⏱ 소요: 1분</a:t>
+            </a:r>
+          </a:p>
+        </p:txBody>
+      </p:sp>
+      <p:sp>
+        <p:nvSpPr>
+          <p:cNvPr id="4" name="Slide Number Placeholder 3"/>
+          <p:cNvSpPr>
+            <a:spLocks noGrp="1"/>
+          </p:cNvSpPr>
+          <p:nvPr>
+            <p:ph type="sldNum" idx="5" sz="quarter"/>
+          </p:nvPr>
+        </p:nvSpPr>
+        <p:spPr/>
+      </p:sp>
+    </p:spTree>
+  </p:cSld>
+  <p:clrMapOvr>
+    <a:masterClrMapping/>
+  </p:clrMapOvr>
+</p:notes>
+</file>
+
+<file path=ppt/notesSlides/notesSlide3.xml><?xml version="1.0" encoding="utf-8"?>
+<p:notes xmlns:a="http://schemas.openxmlformats.org/drawingml/2006/main" xmlns:p="http://schemas.openxmlformats.org/presentationml/2006/main" xmlns:r="http://schemas.openxmlformats.org/officeDocument/2006/relationships">
+  <p:cSld>
+    <p:spTree>
+      <p:nvGrpSpPr>
+        <p:cNvPr id="1" name=""/>
+        <p:cNvGrpSpPr/>
+        <p:nvPr/>
+      </p:nvGrpSpPr>
+      <p:grpSpPr>
+        <a:xfrm>
+          <a:off x="0" y="0"/>
+          <a:ext cx="0" cy="0"/>
+          <a:chOff x="0" y="0"/>
+          <a:chExt cx="0" cy="0"/>
+        </a:xfrm>
+      </p:grpSpPr>
+      <p:sp>
+        <p:nvSpPr>
+          <p:cNvPr id="2" name="Slide Image Placeholder 1"/>
+          <p:cNvSpPr>
+            <a:spLocks noGrp="1"/>
+          </p:cNvSpPr>
+          <p:nvPr>
+            <p:ph type="sldImg" idx="2"/>
+          </p:nvPr>
+        </p:nvSpPr>
+        <p:spPr/>
+      </p:sp>
+      <p:sp>
+        <p:nvSpPr>
+          <p:cNvPr id="3" name="Notes Placeholder 2"/>
+          <p:cNvSpPr>
+            <a:spLocks noGrp="1"/>
+          </p:cNvSpPr>
+          <p:nvPr>
+            <p:ph type="body" idx="3" sz="quarter"/>
+          </p:nvPr>
+        </p:nvSpPr>
+        <p:spPr/>
+        <p:txBody>
+          <a:bodyPr/>
+          <a:lstStyle/>
+          <a:p>
+            <a:r>
+              <a:t>고객이 겪는 손실 3가지. 핵심은 세 번째 — 가동률(%)이 재무 언어(돈)로 번역이 안 됩니다. 그래서 경영 보고가 안 되고, 우리는 그 번역을 자동화합니다.</a:t>
+            </a:r>
+          </a:p>
+          <a:p>
+            <a:r>
+              <a:t>▶ 진행: Aha 한 줄을 천천히 읽어 청중이 자기 조직에 대입하게 만든다.</a:t>
+            </a:r>
+          </a:p>
+          <a:p>
+            <a:r>
+              <a:t>⏱ 소요: 1분</a:t>
+            </a:r>
+          </a:p>
+        </p:txBody>
+      </p:sp>
+      <p:sp>
+        <p:nvSpPr>
+          <p:cNvPr id="4" name="Slide Number Placeholder 3"/>
+          <p:cNvSpPr>
+            <a:spLocks noGrp="1"/>
+          </p:cNvSpPr>
+          <p:nvPr>
+            <p:ph type="sldNum" idx="5" sz="quarter"/>
+          </p:nvPr>
+        </p:nvSpPr>
+        <p:spPr/>
+      </p:sp>
+    </p:spTree>
+  </p:cSld>
+  <p:clrMapOvr>
+    <a:masterClrMapping/>
+  </p:clrMapOvr>
+</p:notes>
+</file>
+
+<file path=ppt/notesSlides/notesSlide4.xml><?xml version="1.0" encoding="utf-8"?>
+<p:notes xmlns:a="http://schemas.openxmlformats.org/drawingml/2006/main" xmlns:p="http://schemas.openxmlformats.org/presentationml/2006/main" xmlns:r="http://schemas.openxmlformats.org/officeDocument/2006/relationships">
+  <p:cSld>
+    <p:spTree>
+      <p:nvGrpSpPr>
+        <p:cNvPr id="1" name=""/>
+        <p:cNvGrpSpPr/>
+        <p:nvPr/>
+      </p:nvGrpSpPr>
+      <p:grpSpPr>
+        <a:xfrm>
+          <a:off x="0" y="0"/>
+          <a:ext cx="0" cy="0"/>
+          <a:chOff x="0" y="0"/>
+          <a:chExt cx="0" cy="0"/>
+        </a:xfrm>
+      </p:grpSpPr>
+      <p:sp>
+        <p:nvSpPr>
+          <p:cNvPr id="2" name="Slide Image Placeholder 1"/>
+          <p:cNvSpPr>
+            <a:spLocks noGrp="1"/>
+          </p:cNvSpPr>
+          <p:nvPr>
+            <p:ph type="sldImg" idx="2"/>
+          </p:nvPr>
+        </p:nvSpPr>
+        <p:spPr/>
+      </p:sp>
+      <p:sp>
+        <p:nvSpPr>
+          <p:cNvPr id="3" name="Notes Placeholder 2"/>
+          <p:cNvSpPr>
+            <a:spLocks noGrp="1"/>
+          </p:cNvSpPr>
+          <p:nvPr>
+            <p:ph type="body" idx="3" sz="quarter"/>
+          </p:nvPr>
+        </p:nvSpPr>
+        <p:spPr/>
+        <p:txBody>
+          <a:bodyPr/>
+          <a:lstStyle/>
+          <a:p>
+            <a:r>
+              <a:t>누구에게 파느냐. 30~120명이 스윗스팟 — 엑셀은 무너지고 해외 PSA(Kantata 등)는 과합니다. 이 '빈 시장'이 우리 진입 근거. 우리 조직이 정확히 이 프로필이라 첫 고객 이해가 깊습니다.</a:t>
+            </a:r>
+          </a:p>
+          <a:p>
+            <a:r>
+              <a:t>▶ 진행: Anti-ICP를 분명히 해서 '아무나 판다'는 인상을 피한다.</a:t>
+            </a:r>
+          </a:p>
+          <a:p>
+            <a:r>
+              <a:t>⏱ 소요: 1분</a:t>
+            </a:r>
+          </a:p>
+        </p:txBody>
+      </p:sp>
+      <p:sp>
+        <p:nvSpPr>
+          <p:cNvPr id="4" name="Slide Number Placeholder 3"/>
+          <p:cNvSpPr>
+            <a:spLocks noGrp="1"/>
+          </p:cNvSpPr>
+          <p:nvPr>
+            <p:ph type="sldNum" idx="5" sz="quarter"/>
+          </p:nvPr>
+        </p:nvSpPr>
+        <p:spPr/>
+      </p:sp>
+    </p:spTree>
+  </p:cSld>
+  <p:clrMapOvr>
+    <a:masterClrMapping/>
+  </p:clrMapOvr>
+</p:notes>
+</file>
+
+<file path=ppt/notesSlides/notesSlide5.xml><?xml version="1.0" encoding="utf-8"?>
+<p:notes xmlns:a="http://schemas.openxmlformats.org/drawingml/2006/main" xmlns:p="http://schemas.openxmlformats.org/presentationml/2006/main" xmlns:r="http://schemas.openxmlformats.org/officeDocument/2006/relationships">
+  <p:cSld>
+    <p:spTree>
+      <p:nvGrpSpPr>
+        <p:cNvPr id="1" name=""/>
+        <p:cNvGrpSpPr/>
+        <p:nvPr/>
+      </p:nvGrpSpPr>
+      <p:grpSpPr>
+        <a:xfrm>
+          <a:off x="0" y="0"/>
+          <a:ext cx="0" cy="0"/>
+          <a:chOff x="0" y="0"/>
+          <a:chExt cx="0" cy="0"/>
+        </a:xfrm>
+      </p:grpSpPr>
+      <p:sp>
+        <p:nvSpPr>
+          <p:cNvPr id="2" name="Slide Image Placeholder 1"/>
+          <p:cNvSpPr>
+            <a:spLocks noGrp="1"/>
+          </p:cNvSpPr>
+          <p:nvPr>
+            <p:ph type="sldImg" idx="2"/>
+          </p:nvPr>
+        </p:nvSpPr>
+        <p:spPr/>
+      </p:sp>
+      <p:sp>
+        <p:nvSpPr>
+          <p:cNvPr id="3" name="Notes Placeholder 2"/>
+          <p:cNvSpPr>
+            <a:spLocks noGrp="1"/>
+          </p:cNvSpPr>
+          <p:nvPr>
+            <p:ph type="body" idx="3" sz="quarter"/>
+          </p:nvPr>
+        </p:nvSpPr>
+        <p:spPr/>
+        <p:txBody>
+          <a:bodyPr/>
+          <a:lstStyle/>
+          <a:p>
+            <a:r>
+              <a:t>제품은 3기둥. 강조점: ①에서 기존 코드 대부분을 재사용하므로 개발 리스크가 작고, ③ AI는 재무 숫자를 계산하지 않고 서사만 담당해 '틀린 숫자' 리스크를 구조적으로 차단합니다.</a:t>
+            </a:r>
+          </a:p>
+          <a:p>
+            <a:r>
+              <a:t>▶ 진행: 차별화 3축이 경쟁사 대비 우리의 '왜 우리냐' 답.</a:t>
+            </a:r>
+          </a:p>
+          <a:p>
+            <a:r>
+              <a:t>⏱ 소요: 1.5분</a:t>
+            </a:r>
+          </a:p>
+        </p:txBody>
+      </p:sp>
+      <p:sp>
+        <p:nvSpPr>
+          <p:cNvPr id="4" name="Slide Number Placeholder 3"/>
+          <p:cNvSpPr>
+            <a:spLocks noGrp="1"/>
+          </p:cNvSpPr>
+          <p:nvPr>
+            <p:ph type="sldNum" idx="5" sz="quarter"/>
+          </p:nvPr>
+        </p:nvSpPr>
+        <p:spPr/>
+      </p:sp>
+    </p:spTree>
+  </p:cSld>
+  <p:clrMapOvr>
+    <a:masterClrMapping/>
+  </p:clrMapOvr>
+</p:notes>
+</file>
+
+<file path=ppt/notesSlides/notesSlide6.xml><?xml version="1.0" encoding="utf-8"?>
+<p:notes xmlns:a="http://schemas.openxmlformats.org/drawingml/2006/main" xmlns:p="http://schemas.openxmlformats.org/presentationml/2006/main" xmlns:r="http://schemas.openxmlformats.org/officeDocument/2006/relationships">
+  <p:cSld>
+    <p:spTree>
+      <p:nvGrpSpPr>
+        <p:cNvPr id="1" name=""/>
+        <p:cNvGrpSpPr/>
+        <p:nvPr/>
+      </p:nvGrpSpPr>
+      <p:grpSpPr>
+        <a:xfrm>
+          <a:off x="0" y="0"/>
+          <a:ext cx="0" cy="0"/>
+          <a:chOff x="0" y="0"/>
+          <a:chExt cx="0" cy="0"/>
+        </a:xfrm>
+      </p:grpSpPr>
+      <p:sp>
+        <p:nvSpPr>
+          <p:cNvPr id="2" name="Slide Image Placeholder 1"/>
+          <p:cNvSpPr>
+            <a:spLocks noGrp="1"/>
+          </p:cNvSpPr>
+          <p:nvPr>
+            <p:ph type="sldImg" idx="2"/>
+          </p:nvPr>
+        </p:nvSpPr>
+        <p:spPr/>
+      </p:sp>
+      <p:sp>
+        <p:nvSpPr>
+          <p:cNvPr id="3" name="Notes Placeholder 2"/>
+          <p:cNvSpPr>
+            <a:spLocks noGrp="1"/>
+          </p:cNvSpPr>
+          <p:nvPr>
+            <p:ph type="body" idx="3" sz="quarter"/>
+          </p:nvPr>
+        </p:nvSpPr>
+        <p:spPr/>
+        <p:txBody>
+          <a:bodyPr/>
+          <a:lstStyle/>
+          <a:p>
+            <a:r>
+              <a:t>MVP는 '한 회사가 도움 없이 가입→세팅→유휴비용 대시보드 도달'까지. M0는 빨간 글씨 그대로 협상 불가 선행조건 — 안 고치면 편집해도 숫자가 목데이터로 고정돼 재무 신뢰가 무너집니다.</a:t>
+            </a:r>
+          </a:p>
+          <a:p>
+            <a:r>
+              <a:t>▶ 진행: 제외 목록으로 '이번엔 안 한다'를 분명히 해 범위 확장을 방어.</a:t>
+            </a:r>
+          </a:p>
+          <a:p>
+            <a:r>
+              <a:t>⏱ 소요: 1.5분</a:t>
+            </a:r>
+          </a:p>
+        </p:txBody>
+      </p:sp>
+      <p:sp>
+        <p:nvSpPr>
+          <p:cNvPr id="4" name="Slide Number Placeholder 3"/>
+          <p:cNvSpPr>
+            <a:spLocks noGrp="1"/>
+          </p:cNvSpPr>
+          <p:nvPr>
+            <p:ph type="sldNum" idx="5" sz="quarter"/>
+          </p:nvPr>
+        </p:nvSpPr>
+        <p:spPr/>
+      </p:sp>
+    </p:spTree>
+  </p:cSld>
+  <p:clrMapOvr>
+    <a:masterClrMapping/>
+  </p:clrMapOvr>
+</p:notes>
+</file>
+
+<file path=ppt/notesSlides/notesSlide7.xml><?xml version="1.0" encoding="utf-8"?>
+<p:notes xmlns:a="http://schemas.openxmlformats.org/drawingml/2006/main" xmlns:p="http://schemas.openxmlformats.org/presentationml/2006/main" xmlns:r="http://schemas.openxmlformats.org/officeDocument/2006/relationships">
+  <p:cSld>
+    <p:spTree>
+      <p:nvGrpSpPr>
+        <p:cNvPr id="1" name=""/>
+        <p:cNvGrpSpPr/>
+        <p:nvPr/>
+      </p:nvGrpSpPr>
+      <p:grpSpPr>
+        <a:xfrm>
+          <a:off x="0" y="0"/>
+          <a:ext cx="0" cy="0"/>
+          <a:chOff x="0" y="0"/>
+          <a:chExt cx="0" cy="0"/>
+        </a:xfrm>
+      </p:grpSpPr>
+      <p:sp>
+        <p:nvSpPr>
+          <p:cNvPr id="2" name="Slide Image Placeholder 1"/>
+          <p:cNvSpPr>
+            <a:spLocks noGrp="1"/>
+          </p:cNvSpPr>
+          <p:nvPr>
+            <p:ph type="sldImg" idx="2"/>
+          </p:nvPr>
+        </p:nvSpPr>
+        <p:spPr/>
+      </p:sp>
+      <p:sp>
+        <p:nvSpPr>
+          <p:cNvPr id="3" name="Notes Placeholder 2"/>
+          <p:cNvSpPr>
+            <a:spLocks noGrp="1"/>
+          </p:cNvSpPr>
+          <p:nvPr>
+            <p:ph type="body" idx="3" sz="quarter"/>
+          </p:nvPr>
+        </p:nvSpPr>
+        <p:spPr/>
+        <p:txBody>
+          <a:bodyPr/>
+          <a:lstStyle/>
+          <a:p>
+            <a:r>
+              <a:t>기술 요지 한 장. 핵심 메시지 2개: (1) 테넌트 격리는 DB(RLS)+앱 2중 방어라 타사 데이터 노출을 막고, (2) useDataStore 시그니처를 유지해 화면 코드를 거의 안 바꾸고 저장소만 교체합니다.</a:t>
+            </a:r>
+          </a:p>
+          <a:p>
+            <a:r>
+              <a:t>▶ 진행: 비개발 경영진에겐 '격리'와 '단가 보호'만 남겨도 충분.</a:t>
+            </a:r>
+          </a:p>
+          <a:p>
+            <a:r>
+              <a:t>⏱ 소요: 1.5분</a:t>
+            </a:r>
+          </a:p>
+        </p:txBody>
+      </p:sp>
+      <p:sp>
+        <p:nvSpPr>
+          <p:cNvPr id="4" name="Slide Number Placeholder 3"/>
+          <p:cNvSpPr>
+            <a:spLocks noGrp="1"/>
+          </p:cNvSpPr>
+          <p:nvPr>
+            <p:ph type="sldNum" idx="5" sz="quarter"/>
+          </p:nvPr>
+        </p:nvSpPr>
+        <p:spPr/>
+      </p:sp>
+    </p:spTree>
+  </p:cSld>
+  <p:clrMapOvr>
+    <a:masterClrMapping/>
+  </p:clrMapOvr>
+</p:notes>
+</file>
+
+<file path=ppt/notesSlides/notesSlide8.xml><?xml version="1.0" encoding="utf-8"?>
+<p:notes xmlns:a="http://schemas.openxmlformats.org/drawingml/2006/main" xmlns:p="http://schemas.openxmlformats.org/presentationml/2006/main" xmlns:r="http://schemas.openxmlformats.org/officeDocument/2006/relationships">
+  <p:cSld>
+    <p:spTree>
+      <p:nvGrpSpPr>
+        <p:cNvPr id="1" name=""/>
+        <p:cNvGrpSpPr/>
+        <p:nvPr/>
+      </p:nvGrpSpPr>
+      <p:grpSpPr>
+        <a:xfrm>
+          <a:off x="0" y="0"/>
+          <a:ext cx="0" cy="0"/>
+          <a:chOff x="0" y="0"/>
+          <a:chExt cx="0" cy="0"/>
+        </a:xfrm>
+      </p:grpSpPr>
+      <p:sp>
+        <p:nvSpPr>
+          <p:cNvPr id="2" name="Slide Image Placeholder 1"/>
+          <p:cNvSpPr>
+            <a:spLocks noGrp="1"/>
+          </p:cNvSpPr>
+          <p:nvPr>
+            <p:ph type="sldImg" idx="2"/>
+          </p:nvPr>
+        </p:nvSpPr>
+        <p:spPr/>
+      </p:sp>
+      <p:sp>
+        <p:nvSpPr>
+          <p:cNvPr id="3" name="Notes Placeholder 2"/>
+          <p:cNvSpPr>
+            <a:spLocks noGrp="1"/>
+          </p:cNvSpPr>
+          <p:nvPr>
+            <p:ph type="body" idx="3" sz="quarter"/>
+          </p:nvPr>
+        </p:nvSpPr>
+        <p:spPr/>
+        <p:txBody>
+          <a:bodyPr/>
+          <a:lstStyle/>
+          <a:p>
+            <a:r>
+              <a:t>AI는 '있으면 좋다'가 아니라 리텐션 훅입니다. F5 자동 브리핑이 매주 이메일로 변화를 요약해 재방문을 만들고, F4 자연어 질의가 경쟁 차별점. 예측군은 데이터가 6~12개월 쌓여야 의미 있어 뒤로 뺐습니다.</a:t>
+            </a:r>
+          </a:p>
+          <a:p>
+            <a:r>
+              <a:t>▶ 진행: '재무 숫자는 앱, 서사는 Claude' 원칙을 여기서도 반복.</a:t>
+            </a:r>
+          </a:p>
+          <a:p>
+            <a:r>
+              <a:t>⏱ 소요: 1분</a:t>
+            </a:r>
+          </a:p>
+        </p:txBody>
+      </p:sp>
+      <p:sp>
+        <p:nvSpPr>
+          <p:cNvPr id="4" name="Slide Number Placeholder 3"/>
+          <p:cNvSpPr>
+            <a:spLocks noGrp="1"/>
+          </p:cNvSpPr>
+          <p:nvPr>
+            <p:ph type="sldNum" idx="5" sz="quarter"/>
+          </p:nvPr>
+        </p:nvSpPr>
+        <p:spPr/>
+      </p:sp>
+    </p:spTree>
+  </p:cSld>
+  <p:clrMapOvr>
+    <a:masterClrMapping/>
+  </p:clrMapOvr>
+</p:notes>
+</file>
+
+<file path=ppt/notesSlides/notesSlide9.xml><?xml version="1.0" encoding="utf-8"?>
+<p:notes xmlns:a="http://schemas.openxmlformats.org/drawingml/2006/main" xmlns:p="http://schemas.openxmlformats.org/presentationml/2006/main" xmlns:r="http://schemas.openxmlformats.org/officeDocument/2006/relationships">
+  <p:cSld>
+    <p:spTree>
+      <p:nvGrpSpPr>
+        <p:cNvPr id="1" name=""/>
+        <p:cNvGrpSpPr/>
+        <p:nvPr/>
+      </p:nvGrpSpPr>
+      <p:grpSpPr>
+        <a:xfrm>
+          <a:off x="0" y="0"/>
+          <a:ext cx="0" cy="0"/>
+          <a:chOff x="0" y="0"/>
+          <a:chExt cx="0" cy="0"/>
+        </a:xfrm>
+      </p:grpSpPr>
+      <p:sp>
+        <p:nvSpPr>
+          <p:cNvPr id="2" name="Slide Image Placeholder 1"/>
+          <p:cNvSpPr>
+            <a:spLocks noGrp="1"/>
+          </p:cNvSpPr>
+          <p:nvPr>
+            <p:ph type="sldImg" idx="2"/>
+          </p:nvPr>
+        </p:nvSpPr>
+        <p:spPr/>
+      </p:sp>
+      <p:sp>
+        <p:nvSpPr>
+          <p:cNvPr id="3" name="Notes Placeholder 2"/>
+          <p:cNvSpPr>
+            <a:spLocks noGrp="1"/>
+          </p:cNvSpPr>
+          <p:nvPr>
+            <p:ph type="body" idx="3" sz="quarter"/>
+          </p:nvPr>
+        </p:nvSpPr>
+        <p:spPr/>
+        <p:txBody>
+          <a:bodyPr/>
+          <a:lstStyle/>
+          <a:p>
+            <a:r>
+              <a:t>과금은 좌석당(관리 대상 인원)×티어. 뷰어는 무료라 조직 안에서 자연 확산됩니다. Pro ₩9,900, Business ₩19,000, AI 애드온 +₩4,000 — 파일럿은 무료로 지불의사부터 검증합니다.</a:t>
+            </a:r>
+          </a:p>
+          <a:p>
+            <a:r>
+              <a:t>▶ 진행: 가격은 '검증 후 조정' 전제임을 밝혀 확정 압박을 피한다.</a:t>
+            </a:r>
+          </a:p>
+          <a:p>
+            <a:r>
+              <a:t>⏱ 소요: 1분</a:t>
+            </a:r>
+          </a:p>
+        </p:txBody>
+      </p:sp>
+      <p:sp>
+        <p:nvSpPr>
+          <p:cNvPr id="4" name="Slide Number Placeholder 3"/>
+          <p:cNvSpPr>
+            <a:spLocks noGrp="1"/>
+          </p:cNvSpPr>
+          <p:nvPr>
+            <p:ph type="sldNum" idx="5" sz="quarter"/>
+          </p:nvPr>
+        </p:nvSpPr>
+        <p:spPr/>
+      </p:sp>
+    </p:spTree>
+  </p:cSld>
+  <p:clrMapOvr>
+    <a:masterClrMapping/>
+  </p:clrMapOvr>
+</p:notes>
 </file>
 
 <file path=ppt/slideLayouts/slideLayout1.xml><?xml version="1.0" encoding="utf-8"?>
@@ -6922,4 +8232,324 @@
   </a:objectDefaults>
   <a:extraClrSchemeLst/>
 </a:theme>
+</file>
+
+<file path=ppt/theme/theme2.xml><?xml version="1.0" encoding="utf-8"?>
+<a:theme xmlns:a="http://schemas.openxmlformats.org/drawingml/2006/main" name="Office Theme">
+  <a:themeElements>
+    <a:clrScheme name="Office">
+      <a:dk1>
+        <a:sysClr val="windowText" lastClr="000000"/>
+      </a:dk1>
+      <a:lt1>
+        <a:sysClr val="window" lastClr="FFFFFF"/>
+      </a:lt1>
+      <a:dk2>
+        <a:srgbClr val="1F497D"/>
+      </a:dk2>
+      <a:lt2>
+        <a:srgbClr val="EEECE1"/>
+      </a:lt2>
+      <a:accent1>
+        <a:srgbClr val="4F81BD"/>
+      </a:accent1>
+      <a:accent2>
+        <a:srgbClr val="C0504D"/>
+      </a:accent2>
+      <a:accent3>
+        <a:srgbClr val="9BBB59"/>
+      </a:accent3>
+      <a:accent4>
+        <a:srgbClr val="8064A2"/>
+      </a:accent4>
+      <a:accent5>
+        <a:srgbClr val="4BACC6"/>
+      </a:accent5>
+      <a:accent6>
+        <a:srgbClr val="F79646"/>
+      </a:accent6>
+      <a:hlink>
+        <a:srgbClr val="0000FF"/>
+      </a:hlink>
+      <a:folHlink>
+        <a:srgbClr val="800080"/>
+      </a:folHlink>
+    </a:clrScheme>
+    <a:fontScheme name="Office">
+      <a:majorFont>
+        <a:latin typeface="Calibri"/>
+        <a:ea typeface=""/>
+        <a:cs typeface=""/>
+        <a:font script="Jpan" typeface="ＭＳ Ｐゴシック"/>
+        <a:font script="Hang" typeface="맑은 고딕"/>
+        <a:font script="Hans" typeface="宋体"/>
+        <a:font script="Hant" typeface="新細明體"/>
+        <a:font script="Arab" typeface="Times New Roman"/>
+        <a:font script="Hebr" typeface="Times New Roman"/>
+        <a:font script="Thai" typeface="Angsana New"/>
+        <a:font script="Ethi" typeface="Nyala"/>
+        <a:font script="Beng" typeface="Vrinda"/>
+        <a:font script="Gujr" typeface="Shruti"/>
+        <a:font script="Khmr" typeface="MoolBoran"/>
+        <a:font script="Knda" typeface="Tunga"/>
+        <a:font script="Guru" typeface="Raavi"/>
+        <a:font script="Cans" typeface="Euphemia"/>
+        <a:font script="Cher" typeface="Plantagenet Cherokee"/>
+        <a:font script="Yiii" typeface="Microsoft Yi Baiti"/>
+        <a:font script="Tibt" typeface="Microsoft Himalaya"/>
+        <a:font script="Thaa" typeface="MV Boli"/>
+        <a:font script="Deva" typeface="Mangal"/>
+        <a:font script="Telu" typeface="Gautami"/>
+        <a:font script="Taml" typeface="Latha"/>
+        <a:font script="Syrc" typeface="Estrangelo Edessa"/>
+        <a:font script="Orya" typeface="Kalinga"/>
+        <a:font script="Mlym" typeface="Kartika"/>
+        <a:font script="Laoo" typeface="DokChampa"/>
+        <a:font script="Sinh" typeface="Iskoola Pota"/>
+        <a:font script="Mong" typeface="Mongolian Baiti"/>
+        <a:font script="Viet" typeface="Times New Roman"/>
+        <a:font script="Uigh" typeface="Microsoft Uighur"/>
+        <a:font script="Geor" typeface="Sylfaen"/>
+      </a:majorFont>
+      <a:minorFont>
+        <a:latin typeface="Calibri"/>
+        <a:ea typeface=""/>
+        <a:cs typeface=""/>
+        <a:font script="Jpan" typeface="ＭＳ Ｐゴシック"/>
+        <a:font script="Hang" typeface="맑은 고딕"/>
+        <a:font script="Hans" typeface="宋体"/>
+        <a:font script="Hant" typeface="新細明體"/>
+        <a:font script="Arab" typeface="Arial"/>
+        <a:font script="Hebr" typeface="Arial"/>
+        <a:font script="Thai" typeface="Cordia New"/>
+        <a:font script="Ethi" typeface="Nyala"/>
+        <a:font script="Beng" typeface="Vrinda"/>
+        <a:font script="Gujr" typeface="Shruti"/>
+        <a:font script="Khmr" typeface="DaunPenh"/>
+        <a:font script="Knda" typeface="Tunga"/>
+        <a:font script="Guru" typeface="Raavi"/>
+        <a:font script="Cans" typeface="Euphemia"/>
+        <a:font script="Cher" typeface="Plantagenet Cherokee"/>
+        <a:font script="Yiii" typeface="Microsoft Yi Baiti"/>
+        <a:font script="Tibt" typeface="Microsoft Himalaya"/>
+        <a:font script="Thaa" typeface="MV Boli"/>
+        <a:font script="Deva" typeface="Mangal"/>
+        <a:font script="Telu" typeface="Gautami"/>
+        <a:font script="Taml" typeface="Latha"/>
+        <a:font script="Syrc" typeface="Estrangelo Edessa"/>
+        <a:font script="Orya" typeface="Kalinga"/>
+        <a:font script="Mlym" typeface="Kartika"/>
+        <a:font script="Laoo" typeface="DokChampa"/>
+        <a:font script="Sinh" typeface="Iskoola Pota"/>
+        <a:font script="Mong" typeface="Mongolian Baiti"/>
+        <a:font script="Viet" typeface="Arial"/>
+        <a:font script="Uigh" typeface="Microsoft Uighur"/>
+        <a:font script="Geor" typeface="Sylfaen"/>
+      </a:minorFont>
+    </a:fontScheme>
+    <a:fmtScheme name="Office">
+      <a:fillStyleLst>
+        <a:solidFill>
+          <a:schemeClr val="phClr"/>
+        </a:solidFill>
+        <a:gradFill rotWithShape="1">
+          <a:gsLst>
+            <a:gs pos="0">
+              <a:schemeClr val="phClr">
+                <a:tint val="50000"/>
+                <a:satMod val="300000"/>
+              </a:schemeClr>
+            </a:gs>
+            <a:gs pos="35000">
+              <a:schemeClr val="phClr">
+                <a:tint val="37000"/>
+                <a:satMod val="300000"/>
+              </a:schemeClr>
+            </a:gs>
+            <a:gs pos="100000">
+              <a:schemeClr val="phClr">
+                <a:tint val="15000"/>
+                <a:satMod val="350000"/>
+              </a:schemeClr>
+            </a:gs>
+          </a:gsLst>
+          <a:lin ang="16200000" scaled="1"/>
+        </a:gradFill>
+        <a:gradFill rotWithShape="1">
+          <a:gsLst>
+            <a:gs pos="0">
+              <a:schemeClr val="phClr">
+                <a:tint val="100000"/>
+                <a:shade val="100000"/>
+                <a:satMod val="130000"/>
+              </a:schemeClr>
+            </a:gs>
+            <a:gs pos="100000">
+              <a:schemeClr val="phClr">
+                <a:tint val="50000"/>
+                <a:shade val="100000"/>
+                <a:satMod val="350000"/>
+              </a:schemeClr>
+            </a:gs>
+          </a:gsLst>
+          <a:lin ang="16200000" scaled="0"/>
+        </a:gradFill>
+      </a:fillStyleLst>
+      <a:lnStyleLst>
+        <a:ln w="9525" cap="flat" cmpd="sng" algn="ctr">
+          <a:solidFill>
+            <a:schemeClr val="phClr">
+              <a:shade val="95000"/>
+              <a:satMod val="105000"/>
+            </a:schemeClr>
+          </a:solidFill>
+          <a:prstDash val="solid"/>
+        </a:ln>
+        <a:ln w="25400" cap="flat" cmpd="sng" algn="ctr">
+          <a:solidFill>
+            <a:schemeClr val="phClr"/>
+          </a:solidFill>
+          <a:prstDash val="solid"/>
+        </a:ln>
+        <a:ln w="38100" cap="flat" cmpd="sng" algn="ctr">
+          <a:solidFill>
+            <a:schemeClr val="phClr"/>
+          </a:solidFill>
+          <a:prstDash val="solid"/>
+        </a:ln>
+      </a:lnStyleLst>
+      <a:effectStyleLst>
+        <a:effectStyle>
+          <a:effectLst>
+            <a:outerShdw blurRad="40000" dist="20000" dir="5400000" rotWithShape="0">
+              <a:srgbClr val="000000">
+                <a:alpha val="38000"/>
+              </a:srgbClr>
+            </a:outerShdw>
+          </a:effectLst>
+        </a:effectStyle>
+        <a:effectStyle>
+          <a:effectLst>
+            <a:outerShdw blurRad="40000" dist="23000" dir="5400000" rotWithShape="0">
+              <a:srgbClr val="000000">
+                <a:alpha val="35000"/>
+              </a:srgbClr>
+            </a:outerShdw>
+          </a:effectLst>
+        </a:effectStyle>
+        <a:effectStyle>
+          <a:effectLst>
+            <a:outerShdw blurRad="40000" dist="23000" dir="5400000" rotWithShape="0">
+              <a:srgbClr val="000000">
+                <a:alpha val="35000"/>
+              </a:srgbClr>
+            </a:outerShdw>
+          </a:effectLst>
+          <a:scene3d>
+            <a:camera prst="orthographicFront">
+              <a:rot lat="0" lon="0" rev="0"/>
+            </a:camera>
+            <a:lightRig rig="threePt" dir="t">
+              <a:rot lat="0" lon="0" rev="1200000"/>
+            </a:lightRig>
+          </a:scene3d>
+          <a:sp3d>
+            <a:bevelT w="63500" h="25400"/>
+          </a:sp3d>
+        </a:effectStyle>
+      </a:effectStyleLst>
+      <a:bgFillStyleLst>
+        <a:solidFill>
+          <a:schemeClr val="phClr"/>
+        </a:solidFill>
+        <a:gradFill rotWithShape="1">
+          <a:gsLst>
+            <a:gs pos="0">
+              <a:schemeClr val="phClr">
+                <a:tint val="40000"/>
+                <a:satMod val="350000"/>
+              </a:schemeClr>
+            </a:gs>
+            <a:gs pos="40000">
+              <a:schemeClr val="phClr">
+                <a:tint val="45000"/>
+                <a:shade val="99000"/>
+                <a:satMod val="350000"/>
+              </a:schemeClr>
+            </a:gs>
+            <a:gs pos="100000">
+              <a:schemeClr val="phClr">
+                <a:shade val="20000"/>
+                <a:satMod val="255000"/>
+              </a:schemeClr>
+            </a:gs>
+          </a:gsLst>
+          <a:path path="circle">
+            <a:fillToRect l="50000" t="-80000" r="50000" b="180000"/>
+          </a:path>
+        </a:gradFill>
+        <a:gradFill rotWithShape="1">
+          <a:gsLst>
+            <a:gs pos="0">
+              <a:schemeClr val="phClr">
+                <a:tint val="80000"/>
+                <a:satMod val="300000"/>
+              </a:schemeClr>
+            </a:gs>
+            <a:gs pos="100000">
+              <a:schemeClr val="phClr">
+                <a:shade val="30000"/>
+                <a:satMod val="200000"/>
+              </a:schemeClr>
+            </a:gs>
+          </a:gsLst>
+          <a:path path="circle">
+            <a:fillToRect l="50000" t="50000" r="50000" b="50000"/>
+          </a:path>
+        </a:gradFill>
+      </a:bgFillStyleLst>
+    </a:fmtScheme>
+  </a:themeElements>
+  <a:objectDefaults>
+    <a:spDef>
+      <a:spPr/>
+      <a:bodyPr/>
+      <a:lstStyle/>
+      <a:style>
+        <a:lnRef idx="1">
+          <a:schemeClr val="accent1"/>
+        </a:lnRef>
+        <a:fillRef idx="3">
+          <a:schemeClr val="accent1"/>
+        </a:fillRef>
+        <a:effectRef idx="2">
+          <a:schemeClr val="accent1"/>
+        </a:effectRef>
+        <a:fontRef idx="minor">
+          <a:schemeClr val="lt1"/>
+        </a:fontRef>
+      </a:style>
+    </a:spDef>
+    <a:lnDef>
+      <a:spPr/>
+      <a:bodyPr/>
+      <a:lstStyle/>
+      <a:style>
+        <a:lnRef idx="2">
+          <a:schemeClr val="accent1"/>
+        </a:lnRef>
+        <a:fillRef idx="0">
+          <a:schemeClr val="accent1"/>
+        </a:fillRef>
+        <a:effectRef idx="1">
+          <a:schemeClr val="accent1"/>
+        </a:effectRef>
+        <a:fontRef idx="minor">
+          <a:schemeClr val="tx1"/>
+        </a:fontRef>
+      </a:style>
+    </a:lnDef>
+  </a:objectDefaults>
+  <a:extraClrSchemeLst/>
+</a:theme>
 </file>